--- a/docs/Domain analysis, app components, project plan/project plan2.pptx
+++ b/docs/Domain analysis, app components, project plan/project plan2.pptx
@@ -854,8 +854,8 @@
         </p:nvSpPr>
         <p:spPr>
           <a:xfrm>
-            <a:off x="3611879" y="2621280"/>
-            <a:ext cx="30480" cy="36830"/>
+            <a:off x="3579876" y="2657856"/>
+            <a:ext cx="32384" cy="30480"/>
           </a:xfrm>
           <a:custGeom>
             <a:avLst/>
@@ -864,21 +864,21 @@
             <a:cxnLst/>
             <a:rect l="l" t="t" r="r" b="b"/>
             <a:pathLst>
-              <a:path w="30479" h="36830">
+              <a:path w="32385" h="30480">
                 <a:moveTo>
-                  <a:pt x="0" y="0"/>
+                  <a:pt x="32004" y="30479"/>
                 </a:moveTo>
                 <a:lnTo>
-                  <a:pt x="30479" y="0"/>
-                </a:lnTo>
-                <a:lnTo>
-                  <a:pt x="30479" y="36575"/>
-                </a:lnTo>
-                <a:lnTo>
-                  <a:pt x="0" y="36575"/>
+                  <a:pt x="0" y="30479"/>
                 </a:lnTo>
                 <a:lnTo>
                   <a:pt x="0" y="0"/>
+                </a:lnTo>
+                <a:lnTo>
+                  <a:pt x="32004" y="0"/>
+                </a:lnTo>
+                <a:lnTo>
+                  <a:pt x="32004" y="30479"/>
                 </a:lnTo>
                 <a:close/>
               </a:path>
@@ -2133,7 +2133,7 @@
         </p:nvGrpSpPr>
         <p:grpSpPr>
           <a:xfrm>
-            <a:off x="3591877" y="3043237"/>
+            <a:off x="3605212" y="3034347"/>
             <a:ext cx="4808855" cy="517525"/>
             <a:chOff x="3591877" y="3043237"/>
             <a:chExt cx="4808855" cy="517525"/>
@@ -2542,7 +2542,7 @@
         </p:nvGrpSpPr>
         <p:grpSpPr>
           <a:xfrm>
-            <a:off x="3604259" y="4788408"/>
+            <a:off x="3609974" y="4788408"/>
             <a:ext cx="4802505" cy="447040"/>
             <a:chOff x="3604259" y="4788408"/>
             <a:chExt cx="4802505" cy="447040"/>
@@ -2683,8 +2683,8 @@
         </p:nvSpPr>
         <p:spPr>
           <a:xfrm>
-            <a:off x="3658639" y="4748274"/>
-            <a:ext cx="584835" cy="455295"/>
+            <a:off x="3658870" y="4748530"/>
+            <a:ext cx="809625" cy="445135"/>
           </a:xfrm>
           <a:prstGeom prst="rect">
             <a:avLst/>
@@ -2705,14 +2705,14 @@
               </a:spcBef>
             </a:pPr>
             <a:r>
-              <a:rPr sz="950" b="1" spc="-10" dirty="0">
+              <a:rPr lang="en-GB" altLang="" sz="950" b="1" spc="-10" dirty="0">
                 <a:solidFill>
                   <a:srgbClr val="FFFFFF"/>
                 </a:solidFill>
                 <a:latin typeface="Calibri" panose="020F0502020204030204"/>
                 <a:cs typeface="Calibri" panose="020F0502020204030204"/>
               </a:rPr>
-              <a:t>Finish</a:t>
+              <a:t>Expected Finish</a:t>
             </a:r>
             <a:endParaRPr sz="950">
               <a:latin typeface="Calibri" panose="020F0502020204030204"/>
@@ -2747,7 +2747,21 @@
                 <a:latin typeface="Calibri" panose="020F0502020204030204"/>
                 <a:cs typeface="Calibri" panose="020F0502020204030204"/>
               </a:rPr>
-              <a:t>6/13/25</a:t>
+              <a:t>6/1</a:t>
+            </a:r>
+            <a:r>
+              <a:rPr lang="en-GB" altLang="" sz="950" spc="-10" dirty="0">
+                <a:latin typeface="Calibri" panose="020F0502020204030204"/>
+                <a:cs typeface="Calibri" panose="020F0502020204030204"/>
+              </a:rPr>
+              <a:t>4</a:t>
+            </a:r>
+            <a:r>
+              <a:rPr sz="950" spc="-10" dirty="0">
+                <a:latin typeface="Calibri" panose="020F0502020204030204"/>
+                <a:cs typeface="Calibri" panose="020F0502020204030204"/>
+              </a:rPr>
+              <a:t>/25</a:t>
             </a:r>
             <a:endParaRPr sz="950">
               <a:latin typeface="Calibri" panose="020F0502020204030204"/>
